--- a/NBody_Presentation.pptx
+++ b/NBody_Presentation.pptx
@@ -503,13 +503,19 @@
           <a:lstStyle/>
           <a:p>
             <a:r>
-              <a:t>Я выполнял задачу номер два — моделирование гравитационного движения N тел. На вход подаются массы, начальные координаты и скорости тел, а также конечное время. Программа рассчитывает движение в трёх измерениях и сохраняет траектории в CSV.</a:t>
+              <a:t>Я выполнял задачу номер два — моделирование гравитационного движения N тел. Реализованы последовательная и параллельная версии на C с POSIX Threads. Программа получает массы, координаты и скорости тел, рассчитывает движение в трёх измерениях и сохраняет траектории в CSV.</a:t>
             </a:r>
           </a:p>
           <a:p/>
           <a:p>
             <a:r>
-              <a:t>Силы рассчитываются по закону всемирного тяготения. Для движения используется явный метод Эйлера. На каждом шаге сначала находятся силы по старым координатам, затем обновляются положения и скорости. Координаты обязательно изменяются по старой скорости. Каждая пара тел рассматривается только один раз: сила прибавляется одному телу и вычитается у другого. Это использование третьего закона Ньютона уменьшает число вычислений взаимодействий вдвое.</a:t>
+              <a:t>Подготовка начинается с Get_options: она разбирает аргументы запуска и проверяет параметры. Read_bodies загружает начальные данные и проверяет массы, координаты и скорости. На каждом шаге Next_time выбирает следующий момент модельного времени; последний шаг при необходимости сокращается.</a:t>
+            </a:r>
+          </a:p>
+          <a:p/>
+          <a:p>
+            <a:r>
+              <a:t>В последовательной версии Compute_forces обходит пары тел. Для каждой пары общая функция Pair_force рассчитывает силу по закону всемирного тяготения. Учитываются только пары i меньше j: одна сила добавляется первому телу и вычитается у второго. Update_body выполняет шаг явного Эйлера: сначала изменяет координаты по старой скорости, затем обновляет скорость. Write_state записывает время и координаты в CSV.</a:t>
             </a:r>
           </a:p>
         </p:txBody>
@@ -579,31 +585,31 @@
           <a:lstStyle/>
           <a:p>
             <a:r>
-              <a:t>Реализованы две версии на C: последовательная и параллельная с POSIX Threads. В параллельной версии рабочие потоки создаются один раз на всё моделирование. Строки перебора пар распределяются между ними циклически. Каждый поток сначала накапливает силы в своём массиве, поэтому при вычислении пар нет одновременной записи в общую сумму.</a:t>
+              <a:t>В параллельной версии pthread_create создаёт работников перед циклом моделирования, а их основная работа находится в Thread_work. Пары распределяются циклически; каждый работник накапливает силы в личном массиве, чтобы избежать одновременной записи в общую сумму.</a:t>
             </a:r>
           </a:p>
           <a:p/>
           <a:p>
             <a:r>
-              <a:t>Один объект барьера используется три раза за шаг. Первый проход разрешает начать расчёт, второй означает готовность всех сил, третий — готовность новых состояний. Между вторым и третьим проходами потоки складывают частичные силы и обновляют непересекающиеся диапазоны тел. После этого главный поток записывает CSV. Результаты двух версий сравниваются с численным допуском.</a:t>
+              <a:t>Wait_barrier синхронизирует участников. За обычный шаг один барьер проходится трижды: старт, готовность сил и готовность новых состояний. Между вторым и третьим проходами работники собирают частичные силы и вызывают Update_body для непересекающихся диапазонов тел. Главный поток записывает результат через Write_state, а после завершения ожидает работников через pthread_join.</a:t>
             </a:r>
           </a:p>
           <a:p/>
           <a:p>
             <a:r>
-              <a:t>Время измеряется внутри C-программ через timer.h. Отдельно выводится время вычислений и время с записью CSV. Для ускорения используется вычислительное время, которое в параллельной версии включает барьеры. Python нужен для повторных запусков, сравнения траекторий и расчёта статистики.</a:t>
+              <a:t>Макрос GET_TIME из timer.h измеряет интервалы внутри C-программы. Для ускорения используется вычислительное время с барьерами, но без записи CSV. Python организует повторные запуски: generate создаёт входные данные, compare сопоставляет траектории с допуском, а основной код benchmark.py собирает времена и статистику.</a:t>
             </a:r>
           </a:p>
           <a:p/>
           <a:p>
             <a:r>
-              <a:t>Замеры выполнены на ноутбуке с Intel Core i5-13420H, в Ubuntu под WSL 2 на Windows 11. Сравнивались 128 и 2048 тел, последовательная версия и один, два, четыре и восемь рабочих потоков. Для каждой конфигурации выполнен один прогрев и пять измерений; в отчёте приведено среднее. Параметры серии: конечное время одна секунда, шаг 0,0625 секунды, то есть 16 шагов.</a:t>
+              <a:t>Замеры выполнены на Intel Core i5-13420H, в Ubuntu под WSL 2. Сравнивались 128 и 2048 тел при одном, двух, четырёх и восьми рабочих потоках. Для каждой конфигурации — один прогрев и пять измерений; использовано среднее. При конечном времени одна секунда и шаге 0,0625 получилось 16 шагов.</a:t>
             </a:r>
           </a:p>
           <a:p/>
           <a:p>
             <a:r>
-              <a:t>Для 2048 тел на восьми потоках получено ускорение примерно в 4,34 раза и эффективность 54,2 процента. Для 128 тел устойчивого выигрыша нет: расходы на синхронизацию могут перекрывать пользу распараллеливания. Таким образом, среди проверенных вариантов распараллеливание полезно на большой задаче. Метод Эйлера остаётся приближённым: для большей точности нужно уменьшать шаг, а столкновения тел здесь не моделируются.</a:t>
+              <a:t>Для 2048 тел на восьми потоках ускорение составило около 4,34 раза, эффективность — 54,2 процента. Для 128 тел устойчивого выигрыша нет из-за накладных расходов. Метод Эйлера остаётся приближённым, поэтому точность зависит от шага; столкновения тел не моделируются.</a:t>
             </a:r>
           </a:p>
         </p:txBody>
